--- a/presentazione_progetto.pptx
+++ b/presentazione_progetto.pptx
@@ -3118,7 +3118,7 @@
                 <a:ea typeface="Calibri" pitchFamily="34" charset="-122"/>
                 <a:cs typeface="Calibri" pitchFamily="34" charset="-120"/>
               </a:rPr>
-              <a:t>ESTENSIONE</a:t>
+              <a:t>LETTERATURA SCIENTIFICA</a:t>
             </a:r>
             <a:endParaRPr lang="en-US" sz="1150" dirty="0"/>
           </a:p>
@@ -3160,7 +3160,7 @@
                 <a:ea typeface="Cambria" pitchFamily="34" charset="-122"/>
                 <a:cs typeface="Cambria" pitchFamily="34" charset="-120"/>
               </a:rPr>
-              <a:t>Il percorso emotivo di tre personaggi</a:t>
+              <a:t>Un metodo coerente con la ricerca esistente</a:t>
             </a:r>
             <a:endParaRPr lang="en-US" sz="2600" dirty="0"/>
           </a:p>
@@ -3168,14 +3168,211 @@
       </p:sp>
       <p:sp>
         <p:nvSpPr>
-          <p:cNvPr id="4" name="Text 2"/>
-          <p:cNvSpPr txBox="1"/>
-          <p:nvPr/>
-        </p:nvSpPr>
-        <p:spPr>
-          <a:xfrm>
-            <a:off x="640080" y="1600200"/>
-            <a:ext cx="10515600" cy="502920"/>
+          <p:cNvPr id="4" name="Shape 2"/>
+          <p:cNvSpPr/>
+          <p:nvPr/>
+        </p:nvSpPr>
+        <p:spPr>
+          <a:xfrm>
+            <a:off x="640080" y="1920240"/>
+            <a:ext cx="5257800" cy="3749040"/>
+          </a:xfrm>
+          <a:prstGeom prst="roundRect">
+            <a:avLst>
+              <a:gd name="adj" fmla="val 1707"/>
+            </a:avLst>
+          </a:prstGeom>
+          <a:solidFill>
+            <a:srgbClr val="FFFFFF"/>
+          </a:solidFill>
+          <a:ln w="12700">
+            <a:solidFill>
+              <a:srgbClr val="E3E7F2"/>
+            </a:solidFill>
+            <a:prstDash val="solid"/>
+          </a:ln>
+          <a:effectLst>
+            <a:outerShdw sx="100000" sy="100000" kx="0" ky="0" algn="bl" rotWithShape="0" blurRad="88900" dist="25400" dir="5400000">
+              <a:srgbClr val="1B1F3B">
+                <a:alpha val="10000"/>
+              </a:srgbClr>
+            </a:outerShdw>
+          </a:effectLst>
+        </p:spPr>
+      </p:sp>
+      <p:sp>
+        <p:nvSpPr>
+          <p:cNvPr id="5" name="Shape 3"/>
+          <p:cNvSpPr/>
+          <p:nvPr/>
+        </p:nvSpPr>
+        <p:spPr>
+          <a:xfrm>
+            <a:off x="960120" y="2240280"/>
+            <a:ext cx="548640" cy="548640"/>
+          </a:xfrm>
+          <a:prstGeom prst="ellipse">
+            <a:avLst/>
+          </a:prstGeom>
+          <a:solidFill>
+            <a:srgbClr val="1E2761"/>
+          </a:solidFill>
+          <a:ln/>
+        </p:spPr>
+      </p:sp>
+      <p:sp>
+        <p:nvSpPr>
+          <p:cNvPr id="6" name="Text 4"/>
+          <p:cNvSpPr txBox="1"/>
+          <p:nvPr/>
+        </p:nvSpPr>
+        <p:spPr>
+          <a:xfrm>
+            <a:off x="960120" y="2359152"/>
+            <a:ext cx="548640" cy="548640"/>
+          </a:xfrm>
+          <a:prstGeom prst="rect">
+            <a:avLst/>
+          </a:prstGeom>
+          <a:noFill/>
+          <a:ln/>
+        </p:spPr>
+        <p:txBody>
+          <a:bodyPr wrap="square" lIns="0" tIns="0" rIns="0" bIns="0" rtlCol="0" anchor="ctr"/>
+          <a:lstStyle/>
+          <a:p>
+            <a:pPr algn="ctr" indent="0" marL="0">
+              <a:buNone/>
+            </a:pPr>
+            <a:r>
+              <a:rPr lang="en-US" sz="2600" b="1" dirty="0">
+                <a:solidFill>
+                  <a:srgbClr val="C9A227"/>
+                </a:solidFill>
+                <a:latin typeface="Cambria" pitchFamily="34" charset="0"/>
+                <a:ea typeface="Cambria" pitchFamily="34" charset="-122"/>
+                <a:cs typeface="Cambria" pitchFamily="34" charset="-120"/>
+              </a:rPr>
+              <a:t>“</a:t>
+            </a:r>
+            <a:endParaRPr lang="en-US" sz="2600" dirty="0"/>
+          </a:p>
+        </p:txBody>
+      </p:sp>
+      <p:sp>
+        <p:nvSpPr>
+          <p:cNvPr id="7" name="Text 5"/>
+          <p:cNvSpPr txBox="1"/>
+          <p:nvPr/>
+        </p:nvSpPr>
+        <p:spPr>
+          <a:xfrm>
+            <a:off x="1691640" y="2240280"/>
+            <a:ext cx="3977640" cy="320040"/>
+          </a:xfrm>
+          <a:prstGeom prst="rect">
+            <a:avLst/>
+          </a:prstGeom>
+          <a:noFill/>
+          <a:ln/>
+        </p:spPr>
+        <p:txBody>
+          <a:bodyPr wrap="square" lIns="0" tIns="0" rIns="0" bIns="0" rtlCol="0" anchor="ctr"/>
+          <a:lstStyle/>
+          <a:p>
+            <a:pPr indent="0" marL="0">
+              <a:buNone/>
+            </a:pPr>
+            <a:r>
+              <a:rPr lang="en-US" sz="1500" b="1" dirty="0">
+                <a:solidFill>
+                  <a:srgbClr val="1B1F3B"/>
+                </a:solidFill>
+                <a:latin typeface="Cambria" pitchFamily="34" charset="0"/>
+                <a:ea typeface="Cambria" pitchFamily="34" charset="-122"/>
+                <a:cs typeface="Cambria" pitchFamily="34" charset="-120"/>
+              </a:rPr>
+              <a:t>Reagan et al., 2016</a:t>
+            </a:r>
+            <a:endParaRPr lang="en-US" sz="1500" dirty="0"/>
+          </a:p>
+        </p:txBody>
+      </p:sp>
+      <p:sp>
+        <p:nvSpPr>
+          <p:cNvPr id="8" name="Text 6"/>
+          <p:cNvSpPr txBox="1"/>
+          <p:nvPr/>
+        </p:nvSpPr>
+        <p:spPr>
+          <a:xfrm>
+            <a:off x="960120" y="2926080"/>
+            <a:ext cx="4617720" cy="685800"/>
+          </a:xfrm>
+          <a:prstGeom prst="rect">
+            <a:avLst/>
+          </a:prstGeom>
+          <a:noFill/>
+          <a:ln/>
+        </p:spPr>
+        <p:txBody>
+          <a:bodyPr wrap="square" lIns="0" tIns="0" rIns="0" bIns="0" rtlCol="0" anchor="ctr"/>
+          <a:lstStyle/>
+          <a:p>
+            <a:pPr indent="0" marL="0">
+              <a:lnSpc>
+                <a:spcPts val="1400"/>
+              </a:lnSpc>
+              <a:buNone/>
+            </a:pPr>
+            <a:r>
+              <a:rPr lang="en-US" sz="1050" i="1" dirty="0">
+                <a:solidFill>
+                  <a:srgbClr val="5B6270"/>
+                </a:solidFill>
+                <a:latin typeface="Calibri" pitchFamily="34" charset="0"/>
+                <a:ea typeface="Calibri" pitchFamily="34" charset="-122"/>
+                <a:cs typeface="Calibri" pitchFamily="34" charset="-120"/>
+              </a:rPr>
+              <a:t>The emotional arcs of stories are dominated by six basic shapes</a:t>
+            </a:r>
+            <a:endParaRPr lang="en-US" sz="1050" dirty="0"/>
+          </a:p>
+        </p:txBody>
+      </p:sp>
+      <p:sp>
+        <p:nvSpPr>
+          <p:cNvPr id="9" name="Shape 7"/>
+          <p:cNvSpPr/>
+          <p:nvPr/>
+        </p:nvSpPr>
+        <p:spPr>
+          <a:xfrm>
+            <a:off x="960120" y="3703320"/>
+            <a:ext cx="4617720" cy="0"/>
+          </a:xfrm>
+          <a:prstGeom prst="line">
+            <a:avLst/>
+          </a:prstGeom>
+          <a:noFill/>
+          <a:ln w="12700">
+            <a:solidFill>
+              <a:srgbClr val="E3E7F2"/>
+            </a:solidFill>
+            <a:prstDash val="solid"/>
+          </a:ln>
+        </p:spPr>
+      </p:sp>
+      <p:sp>
+        <p:nvSpPr>
+          <p:cNvPr id="10" name="Text 8"/>
+          <p:cNvSpPr txBox="1"/>
+          <p:nvPr/>
+        </p:nvSpPr>
+        <p:spPr>
+          <a:xfrm>
+            <a:off x="960120" y="3840480"/>
+            <a:ext cx="4617720" cy="1645920"/>
           </a:xfrm>
           <a:prstGeom prst="rect">
             <a:avLst/>
@@ -3194,76 +3391,162 @@
               <a:buNone/>
             </a:pPr>
             <a:r>
-              <a:rPr lang="en-US" sz="1200" dirty="0">
-                <a:solidFill>
-                  <a:srgbClr val="5B6270"/>
+              <a:rPr lang="en-US" sz="1130" dirty="0">
+                <a:solidFill>
+                  <a:srgbClr val="1B1F3B"/>
                 </a:solidFill>
                 <a:latin typeface="Calibri" pitchFamily="34" charset="0"/>
                 <a:ea typeface="Calibri" pitchFamily="34" charset="-122"/>
                 <a:cs typeface="Calibri" pitchFamily="34" charset="-120"/>
               </a:rPr>
-              <a:t>Isolate le frasi in cui compare il nome di Renzo, Lucia o l'Innominato, e ricalcolato lo stesso punteggio su quel sottoinsieme di testo.</a:t>
-            </a:r>
-            <a:endParaRPr lang="en-US" sz="1200" dirty="0"/>
-          </a:p>
-        </p:txBody>
-      </p:sp>
-      <p:pic>
-        <p:nvPicPr>
-          <p:cNvPr id="5" name="Image 0" descr="/mnt/user-data/outputs/grafico_personaggi.png">    </p:cNvPr>
-          <p:cNvPicPr>
-            <a:picLocks noChangeAspect="1"/>
-          </p:cNvPicPr>
-          <p:nvPr/>
-        </p:nvPicPr>
-        <p:blipFill>
-          <a:blip r:embed="rId1"/>
-          <a:stretch>
-            <a:fillRect/>
-          </a:stretch>
-        </p:blipFill>
-        <p:spPr>
-          <a:xfrm>
-            <a:off x="822960" y="2194560"/>
-            <a:ext cx="7955280" cy="3410712"/>
-          </a:xfrm>
-          <a:prstGeom prst="rect">
-            <a:avLst/>
-          </a:prstGeom>
-        </p:spPr>
-      </p:pic>
-      <p:sp>
-        <p:nvSpPr>
-          <p:cNvPr id="6" name="Shape 3"/>
+              <a:t>Sentiment analysis lessicale applicata a migliaia di opere letterarie: la maggior parte delle storie segue un numero limitato di “forme” emotive ricorrenti — lo stesso tipo di andamento cercato in questo progetto.</a:t>
+            </a:r>
+            <a:endParaRPr lang="en-US" sz="1130" dirty="0"/>
+          </a:p>
+        </p:txBody>
+      </p:sp>
+      <p:sp>
+        <p:nvSpPr>
+          <p:cNvPr id="11" name="Shape 9"/>
           <p:cNvSpPr/>
           <p:nvPr/>
         </p:nvSpPr>
         <p:spPr>
           <a:xfrm>
-            <a:off x="9006840" y="2194560"/>
-            <a:ext cx="2514600" cy="3410712"/>
+            <a:off x="6263640" y="1920240"/>
+            <a:ext cx="5257800" cy="3749040"/>
           </a:xfrm>
           <a:prstGeom prst="roundRect">
             <a:avLst>
-              <a:gd name="adj" fmla="val 2182"/>
+              <a:gd name="adj" fmla="val 1707"/>
             </a:avLst>
           </a:prstGeom>
           <a:solidFill>
-            <a:srgbClr val="3B1E5C"/>
+            <a:srgbClr val="FFFFFF"/>
           </a:solidFill>
-          <a:ln/>
-        </p:spPr>
-      </p:sp>
-      <p:sp>
-        <p:nvSpPr>
-          <p:cNvPr id="7" name="Text 4"/>
-          <p:cNvSpPr txBox="1"/>
-          <p:nvPr/>
-        </p:nvSpPr>
-        <p:spPr>
-          <a:xfrm>
-            <a:off x="9235440" y="2423160"/>
-            <a:ext cx="2103120" cy="457200"/>
+          <a:ln w="12700">
+            <a:solidFill>
+              <a:srgbClr val="E3E7F2"/>
+            </a:solidFill>
+            <a:prstDash val="solid"/>
+          </a:ln>
+          <a:effectLst>
+            <a:outerShdw sx="100000" sy="100000" kx="0" ky="0" algn="bl" rotWithShape="0" blurRad="88900" dist="25400" dir="5400000">
+              <a:srgbClr val="1B1F3B">
+                <a:alpha val="10000"/>
+              </a:srgbClr>
+            </a:outerShdw>
+          </a:effectLst>
+        </p:spPr>
+      </p:sp>
+      <p:sp>
+        <p:nvSpPr>
+          <p:cNvPr id="12" name="Shape 10"/>
+          <p:cNvSpPr/>
+          <p:nvPr/>
+        </p:nvSpPr>
+        <p:spPr>
+          <a:xfrm>
+            <a:off x="6583680" y="2240280"/>
+            <a:ext cx="548640" cy="548640"/>
+          </a:xfrm>
+          <a:prstGeom prst="ellipse">
+            <a:avLst/>
+          </a:prstGeom>
+          <a:solidFill>
+            <a:srgbClr val="1E2761"/>
+          </a:solidFill>
+          <a:ln/>
+        </p:spPr>
+      </p:sp>
+      <p:sp>
+        <p:nvSpPr>
+          <p:cNvPr id="13" name="Text 11"/>
+          <p:cNvSpPr txBox="1"/>
+          <p:nvPr/>
+        </p:nvSpPr>
+        <p:spPr>
+          <a:xfrm>
+            <a:off x="6583680" y="2359152"/>
+            <a:ext cx="548640" cy="548640"/>
+          </a:xfrm>
+          <a:prstGeom prst="rect">
+            <a:avLst/>
+          </a:prstGeom>
+          <a:noFill/>
+          <a:ln/>
+        </p:spPr>
+        <p:txBody>
+          <a:bodyPr wrap="square" lIns="0" tIns="0" rIns="0" bIns="0" rtlCol="0" anchor="ctr"/>
+          <a:lstStyle/>
+          <a:p>
+            <a:pPr algn="ctr" indent="0" marL="0">
+              <a:buNone/>
+            </a:pPr>
+            <a:r>
+              <a:rPr lang="en-US" sz="2600" b="1" dirty="0">
+                <a:solidFill>
+                  <a:srgbClr val="C9A227"/>
+                </a:solidFill>
+                <a:latin typeface="Cambria" pitchFamily="34" charset="0"/>
+                <a:ea typeface="Cambria" pitchFamily="34" charset="-122"/>
+                <a:cs typeface="Cambria" pitchFamily="34" charset="-120"/>
+              </a:rPr>
+              <a:t>“</a:t>
+            </a:r>
+            <a:endParaRPr lang="en-US" sz="2600" dirty="0"/>
+          </a:p>
+        </p:txBody>
+      </p:sp>
+      <p:sp>
+        <p:nvSpPr>
+          <p:cNvPr id="14" name="Text 12"/>
+          <p:cNvSpPr txBox="1"/>
+          <p:nvPr/>
+        </p:nvSpPr>
+        <p:spPr>
+          <a:xfrm>
+            <a:off x="7315200" y="2240280"/>
+            <a:ext cx="3977640" cy="320040"/>
+          </a:xfrm>
+          <a:prstGeom prst="rect">
+            <a:avLst/>
+          </a:prstGeom>
+          <a:noFill/>
+          <a:ln/>
+        </p:spPr>
+        <p:txBody>
+          <a:bodyPr wrap="square" lIns="0" tIns="0" rIns="0" bIns="0" rtlCol="0" anchor="ctr"/>
+          <a:lstStyle/>
+          <a:p>
+            <a:pPr indent="0" marL="0">
+              <a:buNone/>
+            </a:pPr>
+            <a:r>
+              <a:rPr lang="en-US" sz="1500" b="1" dirty="0">
+                <a:solidFill>
+                  <a:srgbClr val="1B1F3B"/>
+                </a:solidFill>
+                <a:latin typeface="Cambria" pitchFamily="34" charset="0"/>
+                <a:ea typeface="Cambria" pitchFamily="34" charset="-122"/>
+                <a:cs typeface="Cambria" pitchFamily="34" charset="-120"/>
+              </a:rPr>
+              <a:t>Rebora, 2020</a:t>
+            </a:r>
+            <a:endParaRPr lang="en-US" sz="1500" dirty="0"/>
+          </a:p>
+        </p:txBody>
+      </p:sp>
+      <p:sp>
+        <p:nvSpPr>
+          <p:cNvPr id="15" name="Text 13"/>
+          <p:cNvSpPr txBox="1"/>
+          <p:nvPr/>
+        </p:nvSpPr>
+        <p:spPr>
+          <a:xfrm>
+            <a:off x="6583680" y="2926080"/>
+            <a:ext cx="4617720" cy="685800"/>
           </a:xfrm>
           <a:prstGeom prst="rect">
             <a:avLst/>
@@ -3277,35 +3560,58 @@
           <a:p>
             <a:pPr indent="0" marL="0">
               <a:lnSpc>
-                <a:spcPts val="1300"/>
+                <a:spcPts val="1400"/>
               </a:lnSpc>
               <a:buNone/>
             </a:pPr>
             <a:r>
-              <a:rPr lang="en-US" sz="1100" b="1" dirty="0">
-                <a:solidFill>
-                  <a:srgbClr val="C9A227"/>
+              <a:rPr lang="en-US" sz="1050" i="1" dirty="0">
+                <a:solidFill>
+                  <a:srgbClr val="5B6270"/>
                 </a:solidFill>
                 <a:latin typeface="Calibri" pitchFamily="34" charset="0"/>
                 <a:ea typeface="Calibri" pitchFamily="34" charset="-122"/>
                 <a:cs typeface="Calibri" pitchFamily="34" charset="-120"/>
               </a:rPr>
-              <a:t>CAPITOLI XIX–XXI</a:t>
-            </a:r>
-            <a:endParaRPr lang="en-US" sz="1100" dirty="0"/>
-          </a:p>
-        </p:txBody>
-      </p:sp>
-      <p:sp>
-        <p:nvSpPr>
-          <p:cNvPr id="8" name="Text 5"/>
-          <p:cNvSpPr txBox="1"/>
-          <p:nvPr/>
-        </p:nvSpPr>
-        <p:spPr>
-          <a:xfrm>
-            <a:off x="9235440" y="2926080"/>
-            <a:ext cx="2103120" cy="2468880"/>
+              <a:t>Shared Emotions in Reading Pirandello. An Experiment with Sentiment Analysis</a:t>
+            </a:r>
+            <a:endParaRPr lang="en-US" sz="1050" dirty="0"/>
+          </a:p>
+        </p:txBody>
+      </p:sp>
+      <p:sp>
+        <p:nvSpPr>
+          <p:cNvPr id="16" name="Shape 14"/>
+          <p:cNvSpPr/>
+          <p:nvPr/>
+        </p:nvSpPr>
+        <p:spPr>
+          <a:xfrm>
+            <a:off x="6583680" y="3703320"/>
+            <a:ext cx="4617720" cy="0"/>
+          </a:xfrm>
+          <a:prstGeom prst="line">
+            <a:avLst/>
+          </a:prstGeom>
+          <a:noFill/>
+          <a:ln w="12700">
+            <a:solidFill>
+              <a:srgbClr val="E3E7F2"/>
+            </a:solidFill>
+            <a:prstDash val="solid"/>
+          </a:ln>
+        </p:spPr>
+      </p:sp>
+      <p:sp>
+        <p:nvSpPr>
+          <p:cNvPr id="17" name="Text 15"/>
+          <p:cNvSpPr txBox="1"/>
+          <p:nvPr/>
+        </p:nvSpPr>
+        <p:spPr>
+          <a:xfrm>
+            <a:off x="6583680" y="3840480"/>
+            <a:ext cx="4617720" cy="1645920"/>
           </a:xfrm>
           <a:prstGeom prst="rect">
             <a:avLst/>
@@ -3324,23 +3630,23 @@
               <a:buNone/>
             </a:pPr>
             <a:r>
-              <a:rPr lang="en-US" sz="1080" dirty="0">
-                <a:solidFill>
-                  <a:srgbClr val="FFFFFF"/>
+              <a:rPr lang="en-US" sz="1130" dirty="0">
+                <a:solidFill>
+                  <a:srgbClr val="1B1F3B"/>
                 </a:solidFill>
                 <a:latin typeface="Calibri" pitchFamily="34" charset="0"/>
                 <a:ea typeface="Calibri" pitchFamily="34" charset="-122"/>
                 <a:cs typeface="Calibri" pitchFamily="34" charset="-120"/>
               </a:rPr>
-              <a:t>L'Innominato tocca il punto più alto (+10,2), poi crolla insieme a Lucia (−6,9 e −9,4) nel capitolo del rapimento e della notte di crisi che precede la sua conversione.</a:t>
-            </a:r>
-            <a:endParaRPr lang="en-US" sz="1080" dirty="0"/>
-          </a:p>
-        </p:txBody>
-      </p:sp>
-      <p:sp>
-        <p:nvSpPr>
-          <p:cNvPr id="9" name="Text 6"/>
+              <a:t>Esperimento su un testo letterario italiano, con studenti che annotano manualmente il sentiment di ogni paragrafo: conferma utilità e limiti di questi metodi in lingua italiana.</a:t>
+            </a:r>
+            <a:endParaRPr lang="en-US" sz="1130" dirty="0"/>
+          </a:p>
+        </p:txBody>
+      </p:sp>
+      <p:sp>
+        <p:nvSpPr>
+          <p:cNvPr id="18" name="Text 16"/>
           <p:cNvSpPr txBox="1"/>
           <p:nvPr/>
         </p:nvSpPr>
@@ -3442,7 +3748,7 @@
                 <a:ea typeface="Calibri" pitchFamily="34" charset="-122"/>
                 <a:cs typeface="Calibri" pitchFamily="34" charset="-120"/>
               </a:rPr>
-              <a:t>RIGORE METODOLOGICO</a:t>
+              <a:t>ESTENSIONE</a:t>
             </a:r>
             <a:endParaRPr lang="en-US" sz="1150" dirty="0"/>
           </a:p>
@@ -3484,7 +3790,7 @@
                 <a:ea typeface="Cambria" pitchFamily="34" charset="-122"/>
                 <a:cs typeface="Cambria" pitchFamily="34" charset="-120"/>
               </a:rPr>
-              <a:t>Non tutti i picchi sono ugualmente affidabili</a:t>
+              <a:t>Il percorso emotivo di tre personaggi</a:t>
             </a:r>
             <a:endParaRPr lang="en-US" sz="2600" dirty="0"/>
           </a:p>
@@ -3498,8 +3804,8 @@
         </p:nvSpPr>
         <p:spPr>
           <a:xfrm>
-            <a:off x="640080" y="1645920"/>
-            <a:ext cx="10515600" cy="548640"/>
+            <a:off x="640080" y="1600200"/>
+            <a:ext cx="10515600" cy="502920"/>
           </a:xfrm>
           <a:prstGeom prst="rect">
             <a:avLst/>
@@ -3526,6 +3832,330 @@
                 <a:ea typeface="Calibri" pitchFamily="34" charset="-122"/>
                 <a:cs typeface="Calibri" pitchFamily="34" charset="-120"/>
               </a:rPr>
+              <a:t>Isolate le frasi in cui compare il nome di Renzo, Lucia o l'Innominato, e ricalcolato lo stesso punteggio su quel sottoinsieme di testo.</a:t>
+            </a:r>
+            <a:endParaRPr lang="en-US" sz="1200" dirty="0"/>
+          </a:p>
+        </p:txBody>
+      </p:sp>
+      <p:pic>
+        <p:nvPicPr>
+          <p:cNvPr id="5" name="Image 0" descr="/mnt/user-data/outputs/grafico_personaggi.png">    </p:cNvPr>
+          <p:cNvPicPr>
+            <a:picLocks noChangeAspect="1"/>
+          </p:cNvPicPr>
+          <p:nvPr/>
+        </p:nvPicPr>
+        <p:blipFill>
+          <a:blip r:embed="rId1"/>
+          <a:stretch>
+            <a:fillRect/>
+          </a:stretch>
+        </p:blipFill>
+        <p:spPr>
+          <a:xfrm>
+            <a:off x="822960" y="2194560"/>
+            <a:ext cx="7955280" cy="3410712"/>
+          </a:xfrm>
+          <a:prstGeom prst="rect">
+            <a:avLst/>
+          </a:prstGeom>
+        </p:spPr>
+      </p:pic>
+      <p:sp>
+        <p:nvSpPr>
+          <p:cNvPr id="6" name="Shape 3"/>
+          <p:cNvSpPr/>
+          <p:nvPr/>
+        </p:nvSpPr>
+        <p:spPr>
+          <a:xfrm>
+            <a:off x="9006840" y="2194560"/>
+            <a:ext cx="2514600" cy="3410712"/>
+          </a:xfrm>
+          <a:prstGeom prst="roundRect">
+            <a:avLst>
+              <a:gd name="adj" fmla="val 2182"/>
+            </a:avLst>
+          </a:prstGeom>
+          <a:solidFill>
+            <a:srgbClr val="3B1E5C"/>
+          </a:solidFill>
+          <a:ln/>
+        </p:spPr>
+      </p:sp>
+      <p:sp>
+        <p:nvSpPr>
+          <p:cNvPr id="7" name="Text 4"/>
+          <p:cNvSpPr txBox="1"/>
+          <p:nvPr/>
+        </p:nvSpPr>
+        <p:spPr>
+          <a:xfrm>
+            <a:off x="9235440" y="2423160"/>
+            <a:ext cx="2103120" cy="457200"/>
+          </a:xfrm>
+          <a:prstGeom prst="rect">
+            <a:avLst/>
+          </a:prstGeom>
+          <a:noFill/>
+          <a:ln/>
+        </p:spPr>
+        <p:txBody>
+          <a:bodyPr wrap="square" lIns="0" tIns="0" rIns="0" bIns="0" rtlCol="0" anchor="ctr"/>
+          <a:lstStyle/>
+          <a:p>
+            <a:pPr indent="0" marL="0">
+              <a:lnSpc>
+                <a:spcPts val="1300"/>
+              </a:lnSpc>
+              <a:buNone/>
+            </a:pPr>
+            <a:r>
+              <a:rPr lang="en-US" sz="1100" b="1" dirty="0">
+                <a:solidFill>
+                  <a:srgbClr val="C9A227"/>
+                </a:solidFill>
+                <a:latin typeface="Calibri" pitchFamily="34" charset="0"/>
+                <a:ea typeface="Calibri" pitchFamily="34" charset="-122"/>
+                <a:cs typeface="Calibri" pitchFamily="34" charset="-120"/>
+              </a:rPr>
+              <a:t>CAPITOLI XIX–XXI</a:t>
+            </a:r>
+            <a:endParaRPr lang="en-US" sz="1100" dirty="0"/>
+          </a:p>
+        </p:txBody>
+      </p:sp>
+      <p:sp>
+        <p:nvSpPr>
+          <p:cNvPr id="8" name="Text 5"/>
+          <p:cNvSpPr txBox="1"/>
+          <p:nvPr/>
+        </p:nvSpPr>
+        <p:spPr>
+          <a:xfrm>
+            <a:off x="9235440" y="2926080"/>
+            <a:ext cx="2103120" cy="2468880"/>
+          </a:xfrm>
+          <a:prstGeom prst="rect">
+            <a:avLst/>
+          </a:prstGeom>
+          <a:noFill/>
+          <a:ln/>
+        </p:spPr>
+        <p:txBody>
+          <a:bodyPr wrap="square" lIns="0" tIns="0" rIns="0" bIns="0" rtlCol="0" anchor="ctr"/>
+          <a:lstStyle/>
+          <a:p>
+            <a:pPr indent="0" marL="0">
+              <a:lnSpc>
+                <a:spcPts val="1600"/>
+              </a:lnSpc>
+              <a:buNone/>
+            </a:pPr>
+            <a:r>
+              <a:rPr lang="en-US" sz="1080" dirty="0">
+                <a:solidFill>
+                  <a:srgbClr val="FFFFFF"/>
+                </a:solidFill>
+                <a:latin typeface="Calibri" pitchFamily="34" charset="0"/>
+                <a:ea typeface="Calibri" pitchFamily="34" charset="-122"/>
+                <a:cs typeface="Calibri" pitchFamily="34" charset="-120"/>
+              </a:rPr>
+              <a:t>L'Innominato tocca il punto più alto (+10,2), poi crolla insieme a Lucia (−6,9 e −9,4) nel capitolo del rapimento e della notte di crisi che precede la sua conversione.</a:t>
+            </a:r>
+            <a:endParaRPr lang="en-US" sz="1080" dirty="0"/>
+          </a:p>
+        </p:txBody>
+      </p:sp>
+      <p:sp>
+        <p:nvSpPr>
+          <p:cNvPr id="9" name="Text 6"/>
+          <p:cNvSpPr txBox="1"/>
+          <p:nvPr/>
+        </p:nvSpPr>
+        <p:spPr>
+          <a:xfrm>
+            <a:off x="11368735" y="6400800"/>
+            <a:ext cx="548640" cy="274320"/>
+          </a:xfrm>
+          <a:prstGeom prst="rect">
+            <a:avLst/>
+          </a:prstGeom>
+          <a:noFill/>
+          <a:ln/>
+        </p:spPr>
+        <p:txBody>
+          <a:bodyPr wrap="square" lIns="0" tIns="0" rIns="0" bIns="0" rtlCol="0" anchor="ctr"/>
+          <a:lstStyle/>
+          <a:p>
+            <a:pPr algn="r" indent="0" marL="0">
+              <a:buNone/>
+            </a:pPr>
+            <a:r>
+              <a:rPr lang="en-US" sz="1000" dirty="0">
+                <a:solidFill>
+                  <a:srgbClr val="A9AFC3"/>
+                </a:solidFill>
+                <a:latin typeface="Calibri" pitchFamily="34" charset="0"/>
+                <a:ea typeface="Calibri" pitchFamily="34" charset="-122"/>
+                <a:cs typeface="Calibri" pitchFamily="34" charset="-120"/>
+              </a:rPr>
+              <a:t>12</a:t>
+            </a:r>
+            <a:endParaRPr lang="en-US" sz="1000" dirty="0"/>
+          </a:p>
+        </p:txBody>
+      </p:sp>
+    </p:spTree>
+  </p:cSld>
+  <p:clrMapOvr>
+    <a:masterClrMapping/>
+  </p:clrMapOvr>
+</p:sld>
+</file>
+
+<file path=ppt/slides/slide13.xml><?xml version="1.0" encoding="utf-8"?>
+<p:sld xmlns:a="http://schemas.openxmlformats.org/drawingml/2006/main" xmlns:r="http://schemas.openxmlformats.org/officeDocument/2006/relationships" xmlns:p="http://schemas.openxmlformats.org/presentationml/2006/main">
+  <p:cSld name="Slide 13">
+    <p:bg>
+      <p:bgPr>
+        <a:solidFill>
+          <a:srgbClr val="F5F7FC"/>
+        </a:solidFill>
+      </p:bgPr>
+    </p:bg>
+    <p:spTree>
+      <p:nvGrpSpPr>
+        <p:cNvPr id="1" name=""/>
+        <p:cNvGrpSpPr/>
+        <p:nvPr/>
+      </p:nvGrpSpPr>
+      <p:grpSpPr>
+        <a:xfrm>
+          <a:off x="0" y="0"/>
+          <a:ext cx="0" cy="0"/>
+          <a:chOff x="0" y="0"/>
+          <a:chExt cx="0" cy="0"/>
+        </a:xfrm>
+      </p:grpSpPr>
+      <p:sp>
+        <p:nvSpPr>
+          <p:cNvPr id="2" name="Text 0"/>
+          <p:cNvSpPr txBox="1"/>
+          <p:nvPr/>
+        </p:nvSpPr>
+        <p:spPr>
+          <a:xfrm>
+            <a:off x="640080" y="457200"/>
+            <a:ext cx="9144000" cy="320040"/>
+          </a:xfrm>
+          <a:prstGeom prst="rect">
+            <a:avLst/>
+          </a:prstGeom>
+          <a:noFill/>
+          <a:ln/>
+        </p:spPr>
+        <p:txBody>
+          <a:bodyPr wrap="square" lIns="0" tIns="0" rIns="0" bIns="0" rtlCol="0" anchor="ctr"/>
+          <a:lstStyle/>
+          <a:p>
+            <a:pPr indent="0" marL="0">
+              <a:buNone/>
+            </a:pPr>
+            <a:r>
+              <a:rPr lang="en-US" sz="1150" b="1" spc="200" kern="0" dirty="0">
+                <a:solidFill>
+                  <a:srgbClr val="C9A227"/>
+                </a:solidFill>
+                <a:latin typeface="Calibri" pitchFamily="34" charset="0"/>
+                <a:ea typeface="Calibri" pitchFamily="34" charset="-122"/>
+                <a:cs typeface="Calibri" pitchFamily="34" charset="-120"/>
+              </a:rPr>
+              <a:t>RIGORE METODOLOGICO</a:t>
+            </a:r>
+            <a:endParaRPr lang="en-US" sz="1150" dirty="0"/>
+          </a:p>
+        </p:txBody>
+      </p:sp>
+      <p:sp>
+        <p:nvSpPr>
+          <p:cNvPr id="3" name="Text 1"/>
+          <p:cNvSpPr txBox="1"/>
+          <p:nvPr/>
+        </p:nvSpPr>
+        <p:spPr>
+          <a:xfrm>
+            <a:off x="640080" y="804672"/>
+            <a:ext cx="10424160" cy="914400"/>
+          </a:xfrm>
+          <a:prstGeom prst="rect">
+            <a:avLst/>
+          </a:prstGeom>
+          <a:noFill/>
+          <a:ln/>
+        </p:spPr>
+        <p:txBody>
+          <a:bodyPr wrap="square" lIns="0" tIns="0" rIns="0" bIns="0" rtlCol="0" anchor="ctr"/>
+          <a:lstStyle/>
+          <a:p>
+            <a:pPr indent="0" marL="0">
+              <a:lnSpc>
+                <a:spcPts val="3000"/>
+              </a:lnSpc>
+              <a:buNone/>
+            </a:pPr>
+            <a:r>
+              <a:rPr lang="en-US" sz="2600" b="1" dirty="0">
+                <a:solidFill>
+                  <a:srgbClr val="1B1F3B"/>
+                </a:solidFill>
+                <a:latin typeface="Cambria" pitchFamily="34" charset="0"/>
+                <a:ea typeface="Cambria" pitchFamily="34" charset="-122"/>
+                <a:cs typeface="Cambria" pitchFamily="34" charset="-120"/>
+              </a:rPr>
+              <a:t>Non tutti i picchi sono ugualmente affidabili</a:t>
+            </a:r>
+            <a:endParaRPr lang="en-US" sz="2600" dirty="0"/>
+          </a:p>
+        </p:txBody>
+      </p:sp>
+      <p:sp>
+        <p:nvSpPr>
+          <p:cNvPr id="4" name="Text 2"/>
+          <p:cNvSpPr txBox="1"/>
+          <p:nvPr/>
+        </p:nvSpPr>
+        <p:spPr>
+          <a:xfrm>
+            <a:off x="640080" y="1645920"/>
+            <a:ext cx="10515600" cy="548640"/>
+          </a:xfrm>
+          <a:prstGeom prst="rect">
+            <a:avLst/>
+          </a:prstGeom>
+          <a:noFill/>
+          <a:ln/>
+        </p:spPr>
+        <p:txBody>
+          <a:bodyPr wrap="square" lIns="0" tIns="0" rIns="0" bIns="0" rtlCol="0" anchor="ctr"/>
+          <a:lstStyle/>
+          <a:p>
+            <a:pPr indent="0" marL="0">
+              <a:lnSpc>
+                <a:spcPts val="1600"/>
+              </a:lnSpc>
+              <a:buNone/>
+            </a:pPr>
+            <a:r>
+              <a:rPr lang="en-US" sz="1200" dirty="0">
+                <a:solidFill>
+                  <a:srgbClr val="5B6270"/>
+                </a:solidFill>
+                <a:latin typeface="Calibri" pitchFamily="34" charset="0"/>
+                <a:ea typeface="Calibri" pitchFamily="34" charset="-122"/>
+                <a:cs typeface="Calibri" pitchFamily="34" charset="-120"/>
+              </a:rPr>
               <a:t>Prima di trarre conclusioni, è stato verificato quante frasi sostenessero ciascuna osservazione: pochi dati rendono il punteggio molto instabile.</a:t>
             </a:r>
             <a:endParaRPr lang="en-US" sz="1200" dirty="0"/>
@@ -3534,7 +4164,7 @@
       </p:sp>
       <p:graphicFrame>
         <p:nvGraphicFramePr>
-          <p:cNvPr id="13" name="Table 0"/>
+          <p:cNvPr id="14" name="Table 0"/>
           <p:cNvGraphicFramePr>
             <a:graphicFrameLocks noGrp="1"/>
           </p:cNvGraphicFramePr>
@@ -5009,636 +5639,6 @@
                 <a:ea typeface="Calibri" pitchFamily="34" charset="-122"/>
                 <a:cs typeface="Calibri" pitchFamily="34" charset="-120"/>
               </a:rPr>
-              <a:t>12</a:t>
-            </a:r>
-            <a:endParaRPr lang="en-US" sz="1000" dirty="0"/>
-          </a:p>
-        </p:txBody>
-      </p:sp>
-    </p:spTree>
-  </p:cSld>
-  <p:clrMapOvr>
-    <a:masterClrMapping/>
-  </p:clrMapOvr>
-</p:sld>
-</file>
-
-<file path=ppt/slides/slide13.xml><?xml version="1.0" encoding="utf-8"?>
-<p:sld xmlns:a="http://schemas.openxmlformats.org/drawingml/2006/main" xmlns:r="http://schemas.openxmlformats.org/officeDocument/2006/relationships" xmlns:p="http://schemas.openxmlformats.org/presentationml/2006/main">
-  <p:cSld name="Slide 13">
-    <p:bg>
-      <p:bgPr>
-        <a:solidFill>
-          <a:srgbClr val="F5F7FC"/>
-        </a:solidFill>
-      </p:bgPr>
-    </p:bg>
-    <p:spTree>
-      <p:nvGrpSpPr>
-        <p:cNvPr id="1" name=""/>
-        <p:cNvGrpSpPr/>
-        <p:nvPr/>
-      </p:nvGrpSpPr>
-      <p:grpSpPr>
-        <a:xfrm>
-          <a:off x="0" y="0"/>
-          <a:ext cx="0" cy="0"/>
-          <a:chOff x="0" y="0"/>
-          <a:chExt cx="0" cy="0"/>
-        </a:xfrm>
-      </p:grpSpPr>
-      <p:sp>
-        <p:nvSpPr>
-          <p:cNvPr id="2" name="Text 0"/>
-          <p:cNvSpPr txBox="1"/>
-          <p:nvPr/>
-        </p:nvSpPr>
-        <p:spPr>
-          <a:xfrm>
-            <a:off x="640080" y="457200"/>
-            <a:ext cx="9144000" cy="320040"/>
-          </a:xfrm>
-          <a:prstGeom prst="rect">
-            <a:avLst/>
-          </a:prstGeom>
-          <a:noFill/>
-          <a:ln/>
-        </p:spPr>
-        <p:txBody>
-          <a:bodyPr wrap="square" lIns="0" tIns="0" rIns="0" bIns="0" rtlCol="0" anchor="ctr"/>
-          <a:lstStyle/>
-          <a:p>
-            <a:pPr indent="0" marL="0">
-              <a:buNone/>
-            </a:pPr>
-            <a:r>
-              <a:rPr lang="en-US" sz="1150" b="1" spc="200" kern="0" dirty="0">
-                <a:solidFill>
-                  <a:srgbClr val="C9A227"/>
-                </a:solidFill>
-                <a:latin typeface="Calibri" pitchFamily="34" charset="0"/>
-                <a:ea typeface="Calibri" pitchFamily="34" charset="-122"/>
-                <a:cs typeface="Calibri" pitchFamily="34" charset="-120"/>
-              </a:rPr>
-              <a:t>LETTERATURA SCIENTIFICA</a:t>
-            </a:r>
-            <a:endParaRPr lang="en-US" sz="1150" dirty="0"/>
-          </a:p>
-        </p:txBody>
-      </p:sp>
-      <p:sp>
-        <p:nvSpPr>
-          <p:cNvPr id="3" name="Text 1"/>
-          <p:cNvSpPr txBox="1"/>
-          <p:nvPr/>
-        </p:nvSpPr>
-        <p:spPr>
-          <a:xfrm>
-            <a:off x="640080" y="804672"/>
-            <a:ext cx="10424160" cy="914400"/>
-          </a:xfrm>
-          <a:prstGeom prst="rect">
-            <a:avLst/>
-          </a:prstGeom>
-          <a:noFill/>
-          <a:ln/>
-        </p:spPr>
-        <p:txBody>
-          <a:bodyPr wrap="square" lIns="0" tIns="0" rIns="0" bIns="0" rtlCol="0" anchor="ctr"/>
-          <a:lstStyle/>
-          <a:p>
-            <a:pPr indent="0" marL="0">
-              <a:lnSpc>
-                <a:spcPts val="3000"/>
-              </a:lnSpc>
-              <a:buNone/>
-            </a:pPr>
-            <a:r>
-              <a:rPr lang="en-US" sz="2600" b="1" dirty="0">
-                <a:solidFill>
-                  <a:srgbClr val="1B1F3B"/>
-                </a:solidFill>
-                <a:latin typeface="Cambria" pitchFamily="34" charset="0"/>
-                <a:ea typeface="Cambria" pitchFamily="34" charset="-122"/>
-                <a:cs typeface="Cambria" pitchFamily="34" charset="-120"/>
-              </a:rPr>
-              <a:t>Un metodo coerente con la ricerca esistente</a:t>
-            </a:r>
-            <a:endParaRPr lang="en-US" sz="2600" dirty="0"/>
-          </a:p>
-        </p:txBody>
-      </p:sp>
-      <p:sp>
-        <p:nvSpPr>
-          <p:cNvPr id="4" name="Shape 2"/>
-          <p:cNvSpPr/>
-          <p:nvPr/>
-        </p:nvSpPr>
-        <p:spPr>
-          <a:xfrm>
-            <a:off x="640080" y="1920240"/>
-            <a:ext cx="5257800" cy="3749040"/>
-          </a:xfrm>
-          <a:prstGeom prst="roundRect">
-            <a:avLst>
-              <a:gd name="adj" fmla="val 1707"/>
-            </a:avLst>
-          </a:prstGeom>
-          <a:solidFill>
-            <a:srgbClr val="FFFFFF"/>
-          </a:solidFill>
-          <a:ln w="12700">
-            <a:solidFill>
-              <a:srgbClr val="E3E7F2"/>
-            </a:solidFill>
-            <a:prstDash val="solid"/>
-          </a:ln>
-          <a:effectLst>
-            <a:outerShdw sx="100000" sy="100000" kx="0" ky="0" algn="bl" rotWithShape="0" blurRad="88900" dist="25400" dir="5400000">
-              <a:srgbClr val="1B1F3B">
-                <a:alpha val="10000"/>
-              </a:srgbClr>
-            </a:outerShdw>
-          </a:effectLst>
-        </p:spPr>
-      </p:sp>
-      <p:sp>
-        <p:nvSpPr>
-          <p:cNvPr id="5" name="Shape 3"/>
-          <p:cNvSpPr/>
-          <p:nvPr/>
-        </p:nvSpPr>
-        <p:spPr>
-          <a:xfrm>
-            <a:off x="960120" y="2240280"/>
-            <a:ext cx="548640" cy="548640"/>
-          </a:xfrm>
-          <a:prstGeom prst="ellipse">
-            <a:avLst/>
-          </a:prstGeom>
-          <a:solidFill>
-            <a:srgbClr val="1E2761"/>
-          </a:solidFill>
-          <a:ln/>
-        </p:spPr>
-      </p:sp>
-      <p:sp>
-        <p:nvSpPr>
-          <p:cNvPr id="6" name="Text 4"/>
-          <p:cNvSpPr txBox="1"/>
-          <p:nvPr/>
-        </p:nvSpPr>
-        <p:spPr>
-          <a:xfrm>
-            <a:off x="960120" y="2359152"/>
-            <a:ext cx="548640" cy="548640"/>
-          </a:xfrm>
-          <a:prstGeom prst="rect">
-            <a:avLst/>
-          </a:prstGeom>
-          <a:noFill/>
-          <a:ln/>
-        </p:spPr>
-        <p:txBody>
-          <a:bodyPr wrap="square" lIns="0" tIns="0" rIns="0" bIns="0" rtlCol="0" anchor="ctr"/>
-          <a:lstStyle/>
-          <a:p>
-            <a:pPr algn="ctr" indent="0" marL="0">
-              <a:buNone/>
-            </a:pPr>
-            <a:r>
-              <a:rPr lang="en-US" sz="2600" b="1" dirty="0">
-                <a:solidFill>
-                  <a:srgbClr val="C9A227"/>
-                </a:solidFill>
-                <a:latin typeface="Cambria" pitchFamily="34" charset="0"/>
-                <a:ea typeface="Cambria" pitchFamily="34" charset="-122"/>
-                <a:cs typeface="Cambria" pitchFamily="34" charset="-120"/>
-              </a:rPr>
-              <a:t>“</a:t>
-            </a:r>
-            <a:endParaRPr lang="en-US" sz="2600" dirty="0"/>
-          </a:p>
-        </p:txBody>
-      </p:sp>
-      <p:sp>
-        <p:nvSpPr>
-          <p:cNvPr id="7" name="Text 5"/>
-          <p:cNvSpPr txBox="1"/>
-          <p:nvPr/>
-        </p:nvSpPr>
-        <p:spPr>
-          <a:xfrm>
-            <a:off x="1691640" y="2240280"/>
-            <a:ext cx="3977640" cy="320040"/>
-          </a:xfrm>
-          <a:prstGeom prst="rect">
-            <a:avLst/>
-          </a:prstGeom>
-          <a:noFill/>
-          <a:ln/>
-        </p:spPr>
-        <p:txBody>
-          <a:bodyPr wrap="square" lIns="0" tIns="0" rIns="0" bIns="0" rtlCol="0" anchor="ctr"/>
-          <a:lstStyle/>
-          <a:p>
-            <a:pPr indent="0" marL="0">
-              <a:buNone/>
-            </a:pPr>
-            <a:r>
-              <a:rPr lang="en-US" sz="1500" b="1" dirty="0">
-                <a:solidFill>
-                  <a:srgbClr val="1B1F3B"/>
-                </a:solidFill>
-                <a:latin typeface="Cambria" pitchFamily="34" charset="0"/>
-                <a:ea typeface="Cambria" pitchFamily="34" charset="-122"/>
-                <a:cs typeface="Cambria" pitchFamily="34" charset="-120"/>
-              </a:rPr>
-              <a:t>Reagan et al., 2016</a:t>
-            </a:r>
-            <a:endParaRPr lang="en-US" sz="1500" dirty="0"/>
-          </a:p>
-        </p:txBody>
-      </p:sp>
-      <p:sp>
-        <p:nvSpPr>
-          <p:cNvPr id="8" name="Text 6"/>
-          <p:cNvSpPr txBox="1"/>
-          <p:nvPr/>
-        </p:nvSpPr>
-        <p:spPr>
-          <a:xfrm>
-            <a:off x="960120" y="2926080"/>
-            <a:ext cx="4617720" cy="685800"/>
-          </a:xfrm>
-          <a:prstGeom prst="rect">
-            <a:avLst/>
-          </a:prstGeom>
-          <a:noFill/>
-          <a:ln/>
-        </p:spPr>
-        <p:txBody>
-          <a:bodyPr wrap="square" lIns="0" tIns="0" rIns="0" bIns="0" rtlCol="0" anchor="ctr"/>
-          <a:lstStyle/>
-          <a:p>
-            <a:pPr indent="0" marL="0">
-              <a:lnSpc>
-                <a:spcPts val="1400"/>
-              </a:lnSpc>
-              <a:buNone/>
-            </a:pPr>
-            <a:r>
-              <a:rPr lang="en-US" sz="1050" i="1" dirty="0">
-                <a:solidFill>
-                  <a:srgbClr val="5B6270"/>
-                </a:solidFill>
-                <a:latin typeface="Calibri" pitchFamily="34" charset="0"/>
-                <a:ea typeface="Calibri" pitchFamily="34" charset="-122"/>
-                <a:cs typeface="Calibri" pitchFamily="34" charset="-120"/>
-              </a:rPr>
-              <a:t>The emotional arcs of stories are dominated by six basic shapes</a:t>
-            </a:r>
-            <a:endParaRPr lang="en-US" sz="1050" dirty="0"/>
-          </a:p>
-        </p:txBody>
-      </p:sp>
-      <p:sp>
-        <p:nvSpPr>
-          <p:cNvPr id="9" name="Shape 7"/>
-          <p:cNvSpPr/>
-          <p:nvPr/>
-        </p:nvSpPr>
-        <p:spPr>
-          <a:xfrm>
-            <a:off x="960120" y="3703320"/>
-            <a:ext cx="4617720" cy="0"/>
-          </a:xfrm>
-          <a:prstGeom prst="line">
-            <a:avLst/>
-          </a:prstGeom>
-          <a:noFill/>
-          <a:ln w="12700">
-            <a:solidFill>
-              <a:srgbClr val="E3E7F2"/>
-            </a:solidFill>
-            <a:prstDash val="solid"/>
-          </a:ln>
-        </p:spPr>
-      </p:sp>
-      <p:sp>
-        <p:nvSpPr>
-          <p:cNvPr id="10" name="Text 8"/>
-          <p:cNvSpPr txBox="1"/>
-          <p:nvPr/>
-        </p:nvSpPr>
-        <p:spPr>
-          <a:xfrm>
-            <a:off x="960120" y="3840480"/>
-            <a:ext cx="4617720" cy="1645920"/>
-          </a:xfrm>
-          <a:prstGeom prst="rect">
-            <a:avLst/>
-          </a:prstGeom>
-          <a:noFill/>
-          <a:ln/>
-        </p:spPr>
-        <p:txBody>
-          <a:bodyPr wrap="square" lIns="0" tIns="0" rIns="0" bIns="0" rtlCol="0" anchor="ctr"/>
-          <a:lstStyle/>
-          <a:p>
-            <a:pPr indent="0" marL="0">
-              <a:lnSpc>
-                <a:spcPts val="1600"/>
-              </a:lnSpc>
-              <a:buNone/>
-            </a:pPr>
-            <a:r>
-              <a:rPr lang="en-US" sz="1130" dirty="0">
-                <a:solidFill>
-                  <a:srgbClr val="1B1F3B"/>
-                </a:solidFill>
-                <a:latin typeface="Calibri" pitchFamily="34" charset="0"/>
-                <a:ea typeface="Calibri" pitchFamily="34" charset="-122"/>
-                <a:cs typeface="Calibri" pitchFamily="34" charset="-120"/>
-              </a:rPr>
-              <a:t>Sentiment analysis lessicale applicata a migliaia di opere letterarie: la maggior parte delle storie segue un numero limitato di “forme” emotive ricorrenti — lo stesso tipo di andamento cercato in questo progetto.</a:t>
-            </a:r>
-            <a:endParaRPr lang="en-US" sz="1130" dirty="0"/>
-          </a:p>
-        </p:txBody>
-      </p:sp>
-      <p:sp>
-        <p:nvSpPr>
-          <p:cNvPr id="11" name="Shape 9"/>
-          <p:cNvSpPr/>
-          <p:nvPr/>
-        </p:nvSpPr>
-        <p:spPr>
-          <a:xfrm>
-            <a:off x="6263640" y="1920240"/>
-            <a:ext cx="5257800" cy="3749040"/>
-          </a:xfrm>
-          <a:prstGeom prst="roundRect">
-            <a:avLst>
-              <a:gd name="adj" fmla="val 1707"/>
-            </a:avLst>
-          </a:prstGeom>
-          <a:solidFill>
-            <a:srgbClr val="FFFFFF"/>
-          </a:solidFill>
-          <a:ln w="12700">
-            <a:solidFill>
-              <a:srgbClr val="E3E7F2"/>
-            </a:solidFill>
-            <a:prstDash val="solid"/>
-          </a:ln>
-          <a:effectLst>
-            <a:outerShdw sx="100000" sy="100000" kx="0" ky="0" algn="bl" rotWithShape="0" blurRad="88900" dist="25400" dir="5400000">
-              <a:srgbClr val="1B1F3B">
-                <a:alpha val="10000"/>
-              </a:srgbClr>
-            </a:outerShdw>
-          </a:effectLst>
-        </p:spPr>
-      </p:sp>
-      <p:sp>
-        <p:nvSpPr>
-          <p:cNvPr id="12" name="Shape 10"/>
-          <p:cNvSpPr/>
-          <p:nvPr/>
-        </p:nvSpPr>
-        <p:spPr>
-          <a:xfrm>
-            <a:off x="6583680" y="2240280"/>
-            <a:ext cx="548640" cy="548640"/>
-          </a:xfrm>
-          <a:prstGeom prst="ellipse">
-            <a:avLst/>
-          </a:prstGeom>
-          <a:solidFill>
-            <a:srgbClr val="1E2761"/>
-          </a:solidFill>
-          <a:ln/>
-        </p:spPr>
-      </p:sp>
-      <p:sp>
-        <p:nvSpPr>
-          <p:cNvPr id="13" name="Text 11"/>
-          <p:cNvSpPr txBox="1"/>
-          <p:nvPr/>
-        </p:nvSpPr>
-        <p:spPr>
-          <a:xfrm>
-            <a:off x="6583680" y="2359152"/>
-            <a:ext cx="548640" cy="548640"/>
-          </a:xfrm>
-          <a:prstGeom prst="rect">
-            <a:avLst/>
-          </a:prstGeom>
-          <a:noFill/>
-          <a:ln/>
-        </p:spPr>
-        <p:txBody>
-          <a:bodyPr wrap="square" lIns="0" tIns="0" rIns="0" bIns="0" rtlCol="0" anchor="ctr"/>
-          <a:lstStyle/>
-          <a:p>
-            <a:pPr algn="ctr" indent="0" marL="0">
-              <a:buNone/>
-            </a:pPr>
-            <a:r>
-              <a:rPr lang="en-US" sz="2600" b="1" dirty="0">
-                <a:solidFill>
-                  <a:srgbClr val="C9A227"/>
-                </a:solidFill>
-                <a:latin typeface="Cambria" pitchFamily="34" charset="0"/>
-                <a:ea typeface="Cambria" pitchFamily="34" charset="-122"/>
-                <a:cs typeface="Cambria" pitchFamily="34" charset="-120"/>
-              </a:rPr>
-              <a:t>“</a:t>
-            </a:r>
-            <a:endParaRPr lang="en-US" sz="2600" dirty="0"/>
-          </a:p>
-        </p:txBody>
-      </p:sp>
-      <p:sp>
-        <p:nvSpPr>
-          <p:cNvPr id="14" name="Text 12"/>
-          <p:cNvSpPr txBox="1"/>
-          <p:nvPr/>
-        </p:nvSpPr>
-        <p:spPr>
-          <a:xfrm>
-            <a:off x="7315200" y="2240280"/>
-            <a:ext cx="3977640" cy="320040"/>
-          </a:xfrm>
-          <a:prstGeom prst="rect">
-            <a:avLst/>
-          </a:prstGeom>
-          <a:noFill/>
-          <a:ln/>
-        </p:spPr>
-        <p:txBody>
-          <a:bodyPr wrap="square" lIns="0" tIns="0" rIns="0" bIns="0" rtlCol="0" anchor="ctr"/>
-          <a:lstStyle/>
-          <a:p>
-            <a:pPr indent="0" marL="0">
-              <a:buNone/>
-            </a:pPr>
-            <a:r>
-              <a:rPr lang="en-US" sz="1500" b="1" dirty="0">
-                <a:solidFill>
-                  <a:srgbClr val="1B1F3B"/>
-                </a:solidFill>
-                <a:latin typeface="Cambria" pitchFamily="34" charset="0"/>
-                <a:ea typeface="Cambria" pitchFamily="34" charset="-122"/>
-                <a:cs typeface="Cambria" pitchFamily="34" charset="-120"/>
-              </a:rPr>
-              <a:t>Rebora, 2020</a:t>
-            </a:r>
-            <a:endParaRPr lang="en-US" sz="1500" dirty="0"/>
-          </a:p>
-        </p:txBody>
-      </p:sp>
-      <p:sp>
-        <p:nvSpPr>
-          <p:cNvPr id="15" name="Text 13"/>
-          <p:cNvSpPr txBox="1"/>
-          <p:nvPr/>
-        </p:nvSpPr>
-        <p:spPr>
-          <a:xfrm>
-            <a:off x="6583680" y="2926080"/>
-            <a:ext cx="4617720" cy="685800"/>
-          </a:xfrm>
-          <a:prstGeom prst="rect">
-            <a:avLst/>
-          </a:prstGeom>
-          <a:noFill/>
-          <a:ln/>
-        </p:spPr>
-        <p:txBody>
-          <a:bodyPr wrap="square" lIns="0" tIns="0" rIns="0" bIns="0" rtlCol="0" anchor="ctr"/>
-          <a:lstStyle/>
-          <a:p>
-            <a:pPr indent="0" marL="0">
-              <a:lnSpc>
-                <a:spcPts val="1400"/>
-              </a:lnSpc>
-              <a:buNone/>
-            </a:pPr>
-            <a:r>
-              <a:rPr lang="en-US" sz="1050" i="1" dirty="0">
-                <a:solidFill>
-                  <a:srgbClr val="5B6270"/>
-                </a:solidFill>
-                <a:latin typeface="Calibri" pitchFamily="34" charset="0"/>
-                <a:ea typeface="Calibri" pitchFamily="34" charset="-122"/>
-                <a:cs typeface="Calibri" pitchFamily="34" charset="-120"/>
-              </a:rPr>
-              <a:t>Shared Emotions in Reading Pirandello. An Experiment with Sentiment Analysis</a:t>
-            </a:r>
-            <a:endParaRPr lang="en-US" sz="1050" dirty="0"/>
-          </a:p>
-        </p:txBody>
-      </p:sp>
-      <p:sp>
-        <p:nvSpPr>
-          <p:cNvPr id="16" name="Shape 14"/>
-          <p:cNvSpPr/>
-          <p:nvPr/>
-        </p:nvSpPr>
-        <p:spPr>
-          <a:xfrm>
-            <a:off x="6583680" y="3703320"/>
-            <a:ext cx="4617720" cy="0"/>
-          </a:xfrm>
-          <a:prstGeom prst="line">
-            <a:avLst/>
-          </a:prstGeom>
-          <a:noFill/>
-          <a:ln w="12700">
-            <a:solidFill>
-              <a:srgbClr val="E3E7F2"/>
-            </a:solidFill>
-            <a:prstDash val="solid"/>
-          </a:ln>
-        </p:spPr>
-      </p:sp>
-      <p:sp>
-        <p:nvSpPr>
-          <p:cNvPr id="17" name="Text 15"/>
-          <p:cNvSpPr txBox="1"/>
-          <p:nvPr/>
-        </p:nvSpPr>
-        <p:spPr>
-          <a:xfrm>
-            <a:off x="6583680" y="3840480"/>
-            <a:ext cx="4617720" cy="1645920"/>
-          </a:xfrm>
-          <a:prstGeom prst="rect">
-            <a:avLst/>
-          </a:prstGeom>
-          <a:noFill/>
-          <a:ln/>
-        </p:spPr>
-        <p:txBody>
-          <a:bodyPr wrap="square" lIns="0" tIns="0" rIns="0" bIns="0" rtlCol="0" anchor="ctr"/>
-          <a:lstStyle/>
-          <a:p>
-            <a:pPr indent="0" marL="0">
-              <a:lnSpc>
-                <a:spcPts val="1600"/>
-              </a:lnSpc>
-              <a:buNone/>
-            </a:pPr>
-            <a:r>
-              <a:rPr lang="en-US" sz="1130" dirty="0">
-                <a:solidFill>
-                  <a:srgbClr val="1B1F3B"/>
-                </a:solidFill>
-                <a:latin typeface="Calibri" pitchFamily="34" charset="0"/>
-                <a:ea typeface="Calibri" pitchFamily="34" charset="-122"/>
-                <a:cs typeface="Calibri" pitchFamily="34" charset="-120"/>
-              </a:rPr>
-              <a:t>Esperimento su un testo letterario italiano, con studenti che annotano manualmente il sentiment di ogni paragrafo: conferma utilità e limiti di questi metodi in lingua italiana.</a:t>
-            </a:r>
-            <a:endParaRPr lang="en-US" sz="1130" dirty="0"/>
-          </a:p>
-        </p:txBody>
-      </p:sp>
-      <p:sp>
-        <p:nvSpPr>
-          <p:cNvPr id="18" name="Text 16"/>
-          <p:cNvSpPr txBox="1"/>
-          <p:nvPr/>
-        </p:nvSpPr>
-        <p:spPr>
-          <a:xfrm>
-            <a:off x="11368735" y="6400800"/>
-            <a:ext cx="548640" cy="274320"/>
-          </a:xfrm>
-          <a:prstGeom prst="rect">
-            <a:avLst/>
-          </a:prstGeom>
-          <a:noFill/>
-          <a:ln/>
-        </p:spPr>
-        <p:txBody>
-          <a:bodyPr wrap="square" lIns="0" tIns="0" rIns="0" bIns="0" rtlCol="0" anchor="ctr"/>
-          <a:lstStyle/>
-          <a:p>
-            <a:pPr algn="r" indent="0" marL="0">
-              <a:buNone/>
-            </a:pPr>
-            <a:r>
-              <a:rPr lang="en-US" sz="1000" dirty="0">
-                <a:solidFill>
-                  <a:srgbClr val="A9AFC3"/>
-                </a:solidFill>
-                <a:latin typeface="Calibri" pitchFamily="34" charset="0"/>
-                <a:ea typeface="Calibri" pitchFamily="34" charset="-122"/>
-                <a:cs typeface="Calibri" pitchFamily="34" charset="-120"/>
-              </a:rPr>
               <a:t>13</a:t>
             </a:r>
             <a:endParaRPr lang="en-US" sz="1000" dirty="0"/>
@@ -10523,11 +10523,11 @@
         <p:spPr>
           <a:xfrm>
             <a:off x="640080" y="3246120"/>
-            <a:ext cx="5212080" cy="2743200"/>
+            <a:ext cx="5212080" cy="2926080"/>
           </a:xfrm>
           <a:prstGeom prst="roundRect">
             <a:avLst>
-              <a:gd name="adj" fmla="val 2000"/>
+              <a:gd name="adj" fmla="val 1875"/>
             </a:avLst>
           </a:prstGeom>
           <a:solidFill>
@@ -10544,7 +10544,7 @@
         </p:nvSpPr>
         <p:spPr>
           <a:xfrm>
-            <a:off x="914400" y="3474720"/>
+            <a:off x="914400" y="3429000"/>
             <a:ext cx="3657600" cy="274320"/>
           </a:xfrm>
           <a:prstGeom prst="rect">
@@ -10583,8 +10583,8 @@
         </p:nvSpPr>
         <p:spPr>
           <a:xfrm>
-            <a:off x="914400" y="3886200"/>
-            <a:ext cx="4663440" cy="731520"/>
+            <a:off x="914400" y="3749040"/>
+            <a:ext cx="4663440" cy="777240"/>
           </a:xfrm>
           <a:prstGeom prst="rect">
             <a:avLst/>
@@ -10597,10 +10597,13 @@
           <a:lstStyle/>
           <a:p>
             <a:pPr indent="0" marL="0">
-              <a:buNone/>
-            </a:pPr>
-            <a:r>
-              <a:rPr lang="en-US" sz="1550" b="1" dirty="0">
+              <a:lnSpc>
+                <a:spcPts val="2200"/>
+              </a:lnSpc>
+              <a:buNone/>
+            </a:pPr>
+            <a:r>
+              <a:rPr lang="en-US" sz="1450" b="1" dirty="0">
                 <a:solidFill>
                   <a:srgbClr val="FFFFFF"/>
                 </a:solidFill>
@@ -10608,9 +10611,29 @@
                 <a:ea typeface="Consolas" pitchFamily="34" charset="-122"/>
                 <a:cs typeface="Consolas" pitchFamily="34" charset="-120"/>
               </a:rPr>
-              <a:t>punteggio = (pos − neg) / parole × 1000</a:t>
-            </a:r>
-            <a:endParaRPr lang="en-US" sz="1550" dirty="0"/>
+              <a:t>(pos − neg) ÷ parole del capitolo</a:t>
+            </a:r>
+            <a:endParaRPr lang="en-US" sz="1450" dirty="0"/>
+          </a:p>
+          <a:p>
+            <a:pPr indent="0" marL="0">
+              <a:lnSpc>
+                <a:spcPts val="2200"/>
+              </a:lnSpc>
+              <a:buNone/>
+            </a:pPr>
+            <a:r>
+              <a:rPr lang="en-US" sz="1450" b="1" dirty="0">
+                <a:solidFill>
+                  <a:srgbClr val="FFFFFF"/>
+                </a:solidFill>
+                <a:latin typeface="Consolas" pitchFamily="34" charset="0"/>
+                <a:ea typeface="Consolas" pitchFamily="34" charset="-122"/>
+                <a:cs typeface="Consolas" pitchFamily="34" charset="-120"/>
+              </a:rPr>
+              <a:t>poi × 1000</a:t>
+            </a:r>
+            <a:endParaRPr lang="en-US" sz="1450" dirty="0"/>
           </a:p>
         </p:txBody>
       </p:sp>
@@ -10622,8 +10645,8 @@
         </p:nvSpPr>
         <p:spPr>
           <a:xfrm>
-            <a:off x="914400" y="4754880"/>
-            <a:ext cx="4663440" cy="1005840"/>
+            <a:off x="914400" y="4617720"/>
+            <a:ext cx="4663440" cy="1417320"/>
           </a:xfrm>
           <a:prstGeom prst="rect">
             <a:avLst/>
@@ -10639,10 +10662,13 @@
               <a:lnSpc>
                 <a:spcPts val="1500"/>
               </a:lnSpc>
-              <a:buNone/>
-            </a:pPr>
-            <a:r>
-              <a:rPr lang="en-US" sz="1100" dirty="0">
+              <a:spcAft>
+                <a:spcPts val="600"/>
+              </a:spcAft>
+              <a:buNone/>
+            </a:pPr>
+            <a:r>
+              <a:rPr lang="en-US" sz="1080" dirty="0">
                 <a:solidFill>
                   <a:srgbClr val="CADCFC"/>
                 </a:solidFill>
@@ -10650,9 +10676,29 @@
                 <a:ea typeface="Calibri" pitchFamily="34" charset="-122"/>
                 <a:cs typeface="Calibri" pitchFamily="34" charset="-120"/>
               </a:rPr>
-              <a:t>Il conteggio è normalizzato ogni 1000 parole, per rendere confrontabili capitoli di lunghezza molto diversa.</a:t>
-            </a:r>
-            <a:endParaRPr lang="en-US" sz="1100" dirty="0"/>
+              <a:t>Si divide per il numero totale di parole di quel capitolo: così capitoli lunghi e corti sono confrontabili.</a:t>
+            </a:r>
+            <a:endParaRPr lang="en-US" sz="1080" dirty="0"/>
+          </a:p>
+          <a:p>
+            <a:pPr indent="0" marL="0">
+              <a:lnSpc>
+                <a:spcPts val="1500"/>
+              </a:lnSpc>
+              <a:buNone/>
+            </a:pPr>
+            <a:r>
+              <a:rPr lang="en-US" sz="1080" dirty="0">
+                <a:solidFill>
+                  <a:srgbClr val="CADCFC"/>
+                </a:solidFill>
+                <a:latin typeface="Calibri" pitchFamily="34" charset="0"/>
+                <a:ea typeface="Calibri" pitchFamily="34" charset="-122"/>
+                <a:cs typeface="Calibri" pitchFamily="34" charset="-120"/>
+              </a:rPr>
+              <a:t>Il × 1000 serve solo per comodità: −0,00928 diventa −9,28, un numero più facile da leggere.</a:t>
+            </a:r>
+            <a:endParaRPr lang="en-US" sz="1080" dirty="0"/>
           </a:p>
         </p:txBody>
       </p:sp>
@@ -10665,11 +10711,11 @@
         <p:spPr>
           <a:xfrm>
             <a:off x="6172200" y="3246120"/>
-            <a:ext cx="5349240" cy="2743200"/>
+            <a:ext cx="5349240" cy="2926080"/>
           </a:xfrm>
           <a:prstGeom prst="roundRect">
             <a:avLst>
-              <a:gd name="adj" fmla="val 2000"/>
+              <a:gd name="adj" fmla="val 1875"/>
             </a:avLst>
           </a:prstGeom>
           <a:solidFill>
@@ -10691,7 +10737,7 @@
         </p:nvSpPr>
         <p:spPr>
           <a:xfrm>
-            <a:off x="6446520" y="3474720"/>
+            <a:off x="6446520" y="3429000"/>
             <a:ext cx="4846320" cy="274320"/>
           </a:xfrm>
           <a:prstGeom prst="rect">
@@ -10730,8 +10776,8 @@
         </p:nvSpPr>
         <p:spPr>
           <a:xfrm>
-            <a:off x="6446520" y="3977640"/>
-            <a:ext cx="1600200" cy="640080"/>
+            <a:off x="6446520" y="3840480"/>
+            <a:ext cx="1600200" cy="594360"/>
           </a:xfrm>
           <a:prstGeom prst="rect">
             <a:avLst/>
@@ -10769,8 +10815,8 @@
         </p:nvSpPr>
         <p:spPr>
           <a:xfrm>
-            <a:off x="6446520" y="4617720"/>
-            <a:ext cx="1600200" cy="502920"/>
+            <a:off x="6446520" y="4434840"/>
+            <a:ext cx="1600200" cy="457200"/>
           </a:xfrm>
           <a:prstGeom prst="rect">
             <a:avLst/>
@@ -10831,8 +10877,8 @@
         </p:nvSpPr>
         <p:spPr>
           <a:xfrm>
-            <a:off x="8183880" y="3977640"/>
-            <a:ext cx="1600200" cy="640080"/>
+            <a:off x="8183880" y="3840480"/>
+            <a:ext cx="1600200" cy="594360"/>
           </a:xfrm>
           <a:prstGeom prst="rect">
             <a:avLst/>
@@ -10870,8 +10916,8 @@
         </p:nvSpPr>
         <p:spPr>
           <a:xfrm>
-            <a:off x="8183880" y="4617720"/>
-            <a:ext cx="1600200" cy="502920"/>
+            <a:off x="8183880" y="4434840"/>
+            <a:ext cx="1600200" cy="457200"/>
           </a:xfrm>
           <a:prstGeom prst="rect">
             <a:avLst/>
@@ -10932,8 +10978,8 @@
         </p:nvSpPr>
         <p:spPr>
           <a:xfrm>
-            <a:off x="9921240" y="3977640"/>
-            <a:ext cx="1600200" cy="640080"/>
+            <a:off x="9921240" y="3840480"/>
+            <a:ext cx="1600200" cy="594360"/>
           </a:xfrm>
           <a:prstGeom prst="rect">
             <a:avLst/>
@@ -10957,7 +11003,7 @@
                 <a:ea typeface="Cambria" pitchFamily="34" charset="-122"/>
                 <a:cs typeface="Cambria" pitchFamily="34" charset="-120"/>
               </a:rPr>
-              <a:t>−9,28</a:t>
+              <a:t>6251</a:t>
             </a:r>
             <a:endParaRPr lang="en-US" sz="2600" dirty="0"/>
           </a:p>
@@ -10971,8 +11017,8 @@
         </p:nvSpPr>
         <p:spPr>
           <a:xfrm>
-            <a:off x="9921240" y="4617720"/>
-            <a:ext cx="1600200" cy="502920"/>
+            <a:off x="9921240" y="4434840"/>
+            <a:ext cx="1600200" cy="457200"/>
           </a:xfrm>
           <a:prstGeom prst="rect">
             <a:avLst/>
@@ -10999,7 +11045,7 @@
                 <a:ea typeface="Calibri" pitchFamily="34" charset="-122"/>
                 <a:cs typeface="Calibri" pitchFamily="34" charset="-120"/>
               </a:rPr>
-              <a:t>punteggio</a:t>
+              <a:t>parole totali</a:t>
             </a:r>
             <a:endParaRPr lang="en-US" sz="1000" dirty="0"/>
           </a:p>
@@ -11019,7 +11065,7 @@
                 <a:ea typeface="Calibri" pitchFamily="34" charset="-122"/>
                 <a:cs typeface="Calibri" pitchFamily="34" charset="-120"/>
               </a:rPr>
-              <a:t>finale</a:t>
+              <a:t>del capitolo</a:t>
             </a:r>
             <a:endParaRPr lang="en-US" sz="1000" dirty="0"/>
           </a:p>
@@ -11027,7 +11073,109 @@
       </p:sp>
       <p:sp>
         <p:nvSpPr>
-          <p:cNvPr id="18" name="Text 16"/>
+          <p:cNvPr id="18" name="Shape 16"/>
+          <p:cNvSpPr/>
+          <p:nvPr/>
+        </p:nvSpPr>
+        <p:spPr>
+          <a:xfrm>
+            <a:off x="6446520" y="5029200"/>
+            <a:ext cx="4892040" cy="0"/>
+          </a:xfrm>
+          <a:prstGeom prst="line">
+            <a:avLst/>
+          </a:prstGeom>
+          <a:noFill/>
+          <a:ln w="12700">
+            <a:solidFill>
+              <a:srgbClr val="E3E7F2"/>
+            </a:solidFill>
+            <a:prstDash val="solid"/>
+          </a:ln>
+        </p:spPr>
+      </p:sp>
+      <p:sp>
+        <p:nvSpPr>
+          <p:cNvPr id="19" name="Text 17"/>
+          <p:cNvSpPr txBox="1"/>
+          <p:nvPr/>
+        </p:nvSpPr>
+        <p:spPr>
+          <a:xfrm>
+            <a:off x="6446520" y="5120640"/>
+            <a:ext cx="4892040" cy="868680"/>
+          </a:xfrm>
+          <a:prstGeom prst="rect">
+            <a:avLst/>
+          </a:prstGeom>
+          <a:noFill/>
+          <a:ln/>
+        </p:spPr>
+        <p:txBody>
+          <a:bodyPr wrap="square" lIns="0" tIns="0" rIns="0" bIns="0" rtlCol="0" anchor="ctr"/>
+          <a:lstStyle/>
+          <a:p>
+            <a:pPr algn="ctr" indent="0" marL="0">
+              <a:lnSpc>
+                <a:spcPts val="2000"/>
+              </a:lnSpc>
+              <a:buNone/>
+            </a:pPr>
+            <a:r>
+              <a:rPr lang="en-US" sz="1250" dirty="0">
+                <a:solidFill>
+                  <a:srgbClr val="1B1F3B"/>
+                </a:solidFill>
+                <a:latin typeface="Consolas" pitchFamily="34" charset="0"/>
+                <a:ea typeface="Consolas" pitchFamily="34" charset="-122"/>
+                <a:cs typeface="Consolas" pitchFamily="34" charset="-120"/>
+              </a:rPr>
+              <a:t>(16 − 74) ÷ 6251 = −0,00928</a:t>
+            </a:r>
+            <a:endParaRPr lang="en-US" sz="1250" dirty="0"/>
+          </a:p>
+          <a:p>
+            <a:pPr algn="ctr" indent="0" marL="0">
+              <a:lnSpc>
+                <a:spcPts val="2000"/>
+              </a:lnSpc>
+              <a:buNone/>
+            </a:pPr>
+            <a:r>
+              <a:rPr lang="en-US" sz="1250" dirty="0">
+                <a:solidFill>
+                  <a:srgbClr val="1B1F3B"/>
+                </a:solidFill>
+                <a:latin typeface="Consolas" pitchFamily="34" charset="0"/>
+                <a:ea typeface="Consolas" pitchFamily="34" charset="-122"/>
+                <a:cs typeface="Consolas" pitchFamily="34" charset="-120"/>
+              </a:rPr>
+              <a:t>× 1000 = </a:t>
+            </a:r>
+            <a:pPr algn="ctr" indent="0" marL="0">
+              <a:lnSpc>
+                <a:spcPts val="2000"/>
+              </a:lnSpc>
+              <a:buNone/>
+            </a:pPr>
+            <a:r>
+              <a:rPr lang="en-US" sz="1250" b="1" dirty="0">
+                <a:solidFill>
+                  <a:srgbClr val="1E2761"/>
+                </a:solidFill>
+                <a:latin typeface="Consolas" pitchFamily="34" charset="0"/>
+                <a:ea typeface="Consolas" pitchFamily="34" charset="-122"/>
+                <a:cs typeface="Consolas" pitchFamily="34" charset="-120"/>
+              </a:rPr>
+              <a:t>−9,28</a:t>
+            </a:r>
+            <a:endParaRPr lang="en-US" sz="1250" dirty="0"/>
+          </a:p>
+        </p:txBody>
+      </p:sp>
+      <p:sp>
+        <p:nvSpPr>
+          <p:cNvPr id="20" name="Text 18"/>
           <p:cNvSpPr txBox="1"/>
           <p:nvPr/>
         </p:nvSpPr>
